--- a/diagrams/aug/hal-number/number.pptx
+++ b/diagrams/aug/hal-number/number.pptx
@@ -3136,7 +3136,7 @@
         <p:spPr>
           <a:xfrm>
             <a:off x="457200" y="731520"/>
-            <a:ext cx="7772400" cy="4899388"/>
+            <a:ext cx="7772400" cy="4536845"/>
           </a:xfrm>
           <a:prstGeom prst="rect">
             <a:avLst/>
